--- a/sample/showcase.pptx
+++ b/sample/showcase.pptx
@@ -42,6 +42,7 @@
     <p:sldId xmlns:ns0="http://schemas.openxmlformats.org/officeDocument/2006/relationships" id="286" ns0:id="rId38"/>
     <p:sldId xmlns:ns0="http://schemas.openxmlformats.org/officeDocument/2006/relationships" id="287" ns0:id="rId39"/>
     <p:sldId xmlns:ns0="http://schemas.openxmlformats.org/officeDocument/2006/relationships" id="288" ns0:id="rId40"/>
+    <p:sldId xmlns:ns0="http://schemas.openxmlformats.org/officeDocument/2006/relationships" id="289" ns0:id="rId41"/>
   </p:sldIdLst>
   <p:sldSz cx="12192000" cy="6858000"/>
   <p:notesSz cx="6858000" cy="9144000"/>
@@ -520,17 +521,12 @@
           <a:lstStyle/>
           <a:p>
             <a:r>
-              <a:t>This slide demonstrates downloading a remote image during rendering.</a:t>
+              <a:t>This slide uses every theme color as a hard band in the background.</a:t>
             </a:r>
           </a:p>
           <a:p>
             <a:r>
-              <a:t>[Sources]</a:t>
-            </a:r>
-          </a:p>
-          <a:p>
-            <a:r>
-              <a:t>- https://raw.githubusercontent.com/github/explore/main/topics/python/python.png (Python logo)</a:t>
+              <a:t>From top to bottom: Dark 1, Light 1, Dark 2, Light 2, Accent 1 through Accent 6, Hyperlink, and Followed Hyperlink.</a:t>
             </a:r>
           </a:p>
         </p:txBody>
@@ -600,7 +596,17 @@
           <a:lstStyle/>
           <a:p>
             <a:r>
-              <a:t>This slide demonstrates a full-slide background image on the Blank layout.</a:t>
+              <a:t>This slide demonstrates downloading a remote image during rendering.</a:t>
+            </a:r>
+          </a:p>
+          <a:p>
+            <a:r>
+              <a:t>[Sources]</a:t>
+            </a:r>
+          </a:p>
+          <a:p>
+            <a:r>
+              <a:t>- https://raw.githubusercontent.com/github/explore/main/topics/python/python.png (Python logo)</a:t>
             </a:r>
           </a:p>
         </p:txBody>
@@ -626,6 +632,76 @@
 </file>
 
 <file path=ppt/notesSlides/notesSlide3.xml><?xml version="1.0" encoding="utf-8"?>
+<p:notes xmlns:a="http://schemas.openxmlformats.org/drawingml/2006/main" xmlns:p="http://schemas.openxmlformats.org/presentationml/2006/main" xmlns:r="http://schemas.openxmlformats.org/officeDocument/2006/relationships">
+  <p:cSld>
+    <p:spTree>
+      <p:nvGrpSpPr>
+        <p:cNvPr id="1" name=""/>
+        <p:cNvGrpSpPr/>
+        <p:nvPr/>
+      </p:nvGrpSpPr>
+      <p:grpSpPr>
+        <a:xfrm>
+          <a:off x="0" y="0"/>
+          <a:ext cx="0" cy="0"/>
+          <a:chOff x="0" y="0"/>
+          <a:chExt cx="0" cy="0"/>
+        </a:xfrm>
+      </p:grpSpPr>
+      <p:sp>
+        <p:nvSpPr>
+          <p:cNvPr id="2" name="Slide Image Placeholder 1"/>
+          <p:cNvSpPr>
+            <a:spLocks noGrp="1"/>
+          </p:cNvSpPr>
+          <p:nvPr>
+            <p:ph type="sldImg" idx="2"/>
+          </p:nvPr>
+        </p:nvSpPr>
+        <p:spPr/>
+      </p:sp>
+      <p:sp>
+        <p:nvSpPr>
+          <p:cNvPr id="3" name="Notes Placeholder 2"/>
+          <p:cNvSpPr>
+            <a:spLocks noGrp="1"/>
+          </p:cNvSpPr>
+          <p:nvPr>
+            <p:ph type="body" idx="3" sz="quarter"/>
+          </p:nvPr>
+        </p:nvSpPr>
+        <p:spPr/>
+        <p:txBody>
+          <a:bodyPr/>
+          <a:lstStyle/>
+          <a:p>
+            <a:r>
+              <a:t>This slide demonstrates a full-slide background image on the Blank layout.</a:t>
+            </a:r>
+          </a:p>
+        </p:txBody>
+      </p:sp>
+      <p:sp>
+        <p:nvSpPr>
+          <p:cNvPr id="4" name="Slide Number Placeholder 3"/>
+          <p:cNvSpPr>
+            <a:spLocks noGrp="1"/>
+          </p:cNvSpPr>
+          <p:nvPr>
+            <p:ph type="sldNum" idx="5" sz="quarter"/>
+          </p:nvPr>
+        </p:nvSpPr>
+        <p:spPr/>
+      </p:sp>
+    </p:spTree>
+  </p:cSld>
+  <p:clrMapOvr>
+    <a:masterClrMapping/>
+  </p:clrMapOvr>
+</p:notes>
+</file>
+
+<file path=ppt/notesSlides/notesSlide4.xml><?xml version="1.0" encoding="utf-8"?>
 <p:notes xmlns:a="http://schemas.openxmlformats.org/drawingml/2006/main" xmlns:p="http://schemas.openxmlformats.org/presentationml/2006/main" xmlns:r="http://schemas.openxmlformats.org/officeDocument/2006/relationships">
   <p:cSld>
     <p:spTree>
@@ -4299,10 +4375,10 @@
   <ns0:themeElements>
     <ns0:clrScheme name="Custom">
       <ns0:dk1>
-        <ns0:sysClr val="windowText" lastClr="10263F"/>
+        <ns0:srgbClr val="10263F"/>
       </ns0:dk1>
       <ns0:lt1>
-        <ns0:sysClr val="window" lastClr="F9F9F9"/>
+        <ns0:srgbClr val="F9F9F9"/>
       </ns0:lt1>
       <ns0:dk2>
         <ns0:srgbClr val="355A78"/>
@@ -4584,10 +4660,10 @@
   <ns0:themeElements>
     <ns0:clrScheme name="Custom">
       <ns0:dk1>
-        <ns0:sysClr val="windowText" lastClr="10263F"/>
+        <ns0:srgbClr val="10263F"/>
       </ns0:dk1>
       <ns0:lt1>
-        <ns0:sysClr val="window" lastClr="F9F9F9"/>
+        <ns0:srgbClr val="F9F9F9"/>
       </ns0:lt1>
       <ns0:dk2>
         <ns0:srgbClr val="355A78"/>
@@ -4969,6 +5045,88 @@
 <file path=ppt/slides/slide10.xml><?xml version="1.0" encoding="utf-8"?>
 <p:sld xmlns:a="http://schemas.openxmlformats.org/drawingml/2006/main" xmlns:p="http://schemas.openxmlformats.org/presentationml/2006/main" xmlns:r="http://schemas.openxmlformats.org/officeDocument/2006/relationships">
   <p:cSld>
+    <p:bg>
+      <p:bgPr>
+        <a:gradFill rotWithShape="1">
+          <a:gsLst>
+            <a:gs pos="0">
+              <a:schemeClr val="dk1"/>
+            </a:gs>
+            <a:gs pos="20000">
+              <a:schemeClr val="dk1"/>
+            </a:gs>
+            <a:gs pos="20000">
+              <a:schemeClr val="lt1"/>
+            </a:gs>
+            <a:gs pos="27272">
+              <a:schemeClr val="lt1"/>
+            </a:gs>
+            <a:gs pos="27272">
+              <a:schemeClr val="dk2"/>
+            </a:gs>
+            <a:gs pos="34545">
+              <a:schemeClr val="dk2"/>
+            </a:gs>
+            <a:gs pos="34545">
+              <a:schemeClr val="lt2"/>
+            </a:gs>
+            <a:gs pos="41818">
+              <a:schemeClr val="lt2"/>
+            </a:gs>
+            <a:gs pos="41818">
+              <a:schemeClr val="accent1"/>
+            </a:gs>
+            <a:gs pos="49091">
+              <a:schemeClr val="accent1"/>
+            </a:gs>
+            <a:gs pos="49091">
+              <a:schemeClr val="accent2"/>
+            </a:gs>
+            <a:gs pos="56363">
+              <a:schemeClr val="accent2"/>
+            </a:gs>
+            <a:gs pos="56363">
+              <a:schemeClr val="accent3"/>
+            </a:gs>
+            <a:gs pos="63636">
+              <a:schemeClr val="accent3"/>
+            </a:gs>
+            <a:gs pos="63636">
+              <a:schemeClr val="accent4"/>
+            </a:gs>
+            <a:gs pos="70909">
+              <a:schemeClr val="accent4"/>
+            </a:gs>
+            <a:gs pos="70909">
+              <a:schemeClr val="accent5"/>
+            </a:gs>
+            <a:gs pos="78182">
+              <a:schemeClr val="accent5"/>
+            </a:gs>
+            <a:gs pos="78182">
+              <a:schemeClr val="accent6"/>
+            </a:gs>
+            <a:gs pos="85455">
+              <a:schemeClr val="accent6"/>
+            </a:gs>
+            <a:gs pos="85455">
+              <a:schemeClr val="hlink"/>
+            </a:gs>
+            <a:gs pos="92727">
+              <a:schemeClr val="hlink"/>
+            </a:gs>
+            <a:gs pos="92727">
+              <a:schemeClr val="folHlink"/>
+            </a:gs>
+            <a:gs pos="100000">
+              <a:schemeClr val="folHlink"/>
+            </a:gs>
+          </a:gsLst>
+          <a:lin ang="5400000" scaled="0"/>
+        </a:gradFill>
+        <a:effectLst/>
+      </p:bgPr>
+    </p:bg>
     <p:spTree>
       <p:nvGrpSpPr>
         <p:cNvPr id="1" name=""/>
@@ -4996,85 +5154,21 @@
             <a:pPr>
               <a:defRPr>
                 <a:solidFill>
-                  <a:schemeClr val="accent6"/>
+                  <a:schemeClr val="lt1"/>
                 </a:solidFill>
               </a:defRPr>
             </a:pPr>
             <a:r>
               <a:rPr>
                 <a:solidFill>
-                  <a:schemeClr val="accent6"/>
-                </a:solidFill>
-              </a:rPr>
-              <a:t>Feature examples</a:t>
+                  <a:schemeClr val="lt1"/>
+                </a:solidFill>
+              </a:rPr>
+              <a:t>Every PowerPoint theme color</a:t>
             </a:r>
             <a:endParaRPr>
               <a:solidFill>
-                <a:schemeClr val="accent6"/>
-              </a:solidFill>
-            </a:endParaRPr>
-          </a:p>
-        </p:txBody>
-      </p:sp>
-      <p:sp>
-        <p:nvSpPr>
-          <p:cNvPr id="3" name="Text Placeholder 2"/>
-          <p:cNvSpPr>
-            <a:spLocks noGrp="1"/>
-          </p:cNvSpPr>
-          <p:nvPr>
-            <p:ph type="body" idx="1"/>
-          </p:nvPr>
-        </p:nvSpPr>
-        <p:spPr/>
-        <p:txBody>
-          <a:bodyPr wrap="square">
-            <a:normAutofit/>
-          </a:bodyPr>
-          <a:lstStyle/>
-          <a:p>
-            <a:pPr marL="0" indent="0">
-              <a:buNone/>
-              <a:defRPr>
-                <a:solidFill>
-                  <a:schemeClr val="dk1"/>
-                </a:solidFill>
-              </a:defRPr>
-            </a:pPr>
-            <a:r>
-              <a:rPr b="0" i="0">
-                <a:latin typeface="+mn-lt"/>
-                <a:ea typeface="+mn-ea"/>
-                <a:cs typeface="+mn-cs"/>
-                <a:solidFill>
-                  <a:schemeClr val="dk1"/>
-                </a:solidFill>
-              </a:rPr>
-              <a:t>Each slide after this one isolates a single </a:t>
-            </a:r>
-            <a:r>
-              <a:rPr b="0" i="0">
-                <a:latin typeface="Consolas"/>
-                <a:solidFill>
-                  <a:schemeClr val="dk1"/>
-                </a:solidFill>
-              </a:rPr>
-              <a:t>markdown-pptx</a:t>
-            </a:r>
-            <a:r>
-              <a:rPr b="0" i="0">
-                <a:latin typeface="+mn-lt"/>
-                <a:ea typeface="+mn-ea"/>
-                <a:cs typeface="+mn-cs"/>
-                <a:solidFill>
-                  <a:schemeClr val="dk1"/>
-                </a:solidFill>
-              </a:rPr>
-              <a:t> feature.</a:t>
-            </a:r>
-            <a:endParaRPr>
-              <a:solidFill>
-                <a:schemeClr val="dk1"/>
+                <a:schemeClr val="lt1"/>
               </a:solidFill>
             </a:endParaRPr>
           </a:p>
@@ -5105,7 +5199,7 @@
             <a:spLocks noGrp="1"/>
           </p:cNvSpPr>
           <p:nvPr>
-            <p:ph type="ctrTitle"/>
+            <p:ph type="title"/>
           </p:nvPr>
         </p:nvSpPr>
         <p:spPr/>
@@ -5128,7 +5222,7 @@
                   <a:schemeClr val="accent6"/>
                 </a:solidFill>
               </a:rPr>
-              <a:t>Title Slide layout</a:t>
+              <a:t>Feature examples</a:t>
             </a:r>
             <a:endParaRPr>
               <a:solidFill>
@@ -5140,12 +5234,12 @@
       </p:sp>
       <p:sp>
         <p:nvSpPr>
-          <p:cNvPr id="3" name="Subtitle 2"/>
+          <p:cNvPr id="3" name="Text Placeholder 2"/>
           <p:cNvSpPr>
             <a:spLocks noGrp="1"/>
           </p:cNvSpPr>
           <p:nvPr>
-            <p:ph type="subTitle" idx="1"/>
+            <p:ph type="body" idx="1"/>
           </p:nvPr>
         </p:nvSpPr>
         <p:spPr/>
@@ -5172,7 +5266,27 @@
                   <a:schemeClr val="dk1"/>
                 </a:solidFill>
               </a:rPr>
-              <a:t>This slide uses the Title Slide layout.</a:t>
+              <a:t>Each slide after this one isolates a single </a:t>
+            </a:r>
+            <a:r>
+              <a:rPr b="0" i="0">
+                <a:latin typeface="Consolas"/>
+                <a:solidFill>
+                  <a:schemeClr val="dk1"/>
+                </a:solidFill>
+              </a:rPr>
+              <a:t>markdown-pptx</a:t>
+            </a:r>
+            <a:r>
+              <a:rPr b="0" i="0">
+                <a:latin typeface="+mn-lt"/>
+                <a:ea typeface="+mn-ea"/>
+                <a:cs typeface="+mn-cs"/>
+                <a:solidFill>
+                  <a:schemeClr val="dk1"/>
+                </a:solidFill>
+              </a:rPr>
+              <a:t> feature.</a:t>
             </a:r>
             <a:endParaRPr>
               <a:solidFill>
@@ -5207,7 +5321,7 @@
             <a:spLocks noGrp="1"/>
           </p:cNvSpPr>
           <p:nvPr>
-            <p:ph type="title"/>
+            <p:ph type="ctrTitle"/>
           </p:nvPr>
         </p:nvSpPr>
         <p:spPr/>
@@ -5230,7 +5344,7 @@
                   <a:schemeClr val="accent6"/>
                 </a:solidFill>
               </a:rPr>
-              <a:t>Section Header layout</a:t>
+              <a:t>Title Slide layout</a:t>
             </a:r>
             <a:endParaRPr>
               <a:solidFill>
@@ -5242,12 +5356,12 @@
       </p:sp>
       <p:sp>
         <p:nvSpPr>
-          <p:cNvPr id="3" name="Text Placeholder 2"/>
+          <p:cNvPr id="3" name="Subtitle 2"/>
           <p:cNvSpPr>
             <a:spLocks noGrp="1"/>
           </p:cNvSpPr>
           <p:nvPr>
-            <p:ph type="body" idx="1"/>
+            <p:ph type="subTitle" idx="1"/>
           </p:nvPr>
         </p:nvSpPr>
         <p:spPr/>
@@ -5274,7 +5388,7 @@
                   <a:schemeClr val="dk1"/>
                 </a:solidFill>
               </a:rPr>
-              <a:t>This slide uses the Section Header layout.</a:t>
+              <a:t>This slide uses the Title Slide layout.</a:t>
             </a:r>
             <a:endParaRPr>
               <a:solidFill>
@@ -5332,7 +5446,7 @@
                   <a:schemeClr val="accent6"/>
                 </a:solidFill>
               </a:rPr>
-              <a:t>Title and Content layout</a:t>
+              <a:t>Section Header layout</a:t>
             </a:r>
             <a:endParaRPr>
               <a:solidFill>
@@ -5344,12 +5458,12 @@
       </p:sp>
       <p:sp>
         <p:nvSpPr>
-          <p:cNvPr id="3" name="Content Placeholder 2"/>
+          <p:cNvPr id="3" name="Text Placeholder 2"/>
           <p:cNvSpPr>
             <a:spLocks noGrp="1"/>
           </p:cNvSpPr>
           <p:nvPr>
-            <p:ph idx="1"/>
+            <p:ph type="body" idx="1"/>
           </p:nvPr>
         </p:nvSpPr>
         <p:spPr/>
@@ -5376,7 +5490,7 @@
                   <a:schemeClr val="dk1"/>
                 </a:solidFill>
               </a:rPr>
-              <a:t>This slide explicitly uses master 1 and its Title and Content layout.</a:t>
+              <a:t>This slide uses the Section Header layout.</a:t>
             </a:r>
             <a:endParaRPr>
               <a:solidFill>
@@ -5434,11 +5548,55 @@
                   <a:schemeClr val="accent6"/>
                 </a:solidFill>
               </a:rPr>
-              <a:t>Title Only layout</a:t>
+              <a:t>Title and Content layout</a:t>
             </a:r>
             <a:endParaRPr>
               <a:solidFill>
                 <a:schemeClr val="accent6"/>
+              </a:solidFill>
+            </a:endParaRPr>
+          </a:p>
+        </p:txBody>
+      </p:sp>
+      <p:sp>
+        <p:nvSpPr>
+          <p:cNvPr id="3" name="Content Placeholder 2"/>
+          <p:cNvSpPr>
+            <a:spLocks noGrp="1"/>
+          </p:cNvSpPr>
+          <p:nvPr>
+            <p:ph idx="1"/>
+          </p:nvPr>
+        </p:nvSpPr>
+        <p:spPr/>
+        <p:txBody>
+          <a:bodyPr wrap="square">
+            <a:normAutofit/>
+          </a:bodyPr>
+          <a:lstStyle/>
+          <a:p>
+            <a:pPr marL="0" indent="0">
+              <a:buNone/>
+              <a:defRPr>
+                <a:solidFill>
+                  <a:schemeClr val="dk1"/>
+                </a:solidFill>
+              </a:defRPr>
+            </a:pPr>
+            <a:r>
+              <a:rPr b="0" i="0">
+                <a:latin typeface="+mn-lt"/>
+                <a:ea typeface="+mn-ea"/>
+                <a:cs typeface="+mn-cs"/>
+                <a:solidFill>
+                  <a:schemeClr val="dk1"/>
+                </a:solidFill>
+              </a:rPr>
+              <a:t>This slide explicitly uses master 1 and its Title and Content layout.</a:t>
+            </a:r>
+            <a:endParaRPr>
+              <a:solidFill>
+                <a:schemeClr val="dk1"/>
               </a:solidFill>
             </a:endParaRPr>
           </a:p>
@@ -5492,110 +5650,11 @@
                   <a:schemeClr val="accent6"/>
                 </a:solidFill>
               </a:rPr>
-              <a:t>Body text with hyperlinks</a:t>
+              <a:t>Title Only layout</a:t>
             </a:r>
             <a:endParaRPr>
               <a:solidFill>
                 <a:schemeClr val="accent6"/>
-              </a:solidFill>
-            </a:endParaRPr>
-          </a:p>
-        </p:txBody>
-      </p:sp>
-      <p:sp>
-        <p:nvSpPr>
-          <p:cNvPr id="3" name="Content Placeholder 2"/>
-          <p:cNvSpPr>
-            <a:spLocks noGrp="1"/>
-          </p:cNvSpPr>
-          <p:nvPr>
-            <p:ph idx="1"/>
-          </p:nvPr>
-        </p:nvSpPr>
-        <p:spPr/>
-        <p:txBody>
-          <a:bodyPr wrap="square">
-            <a:normAutofit/>
-          </a:bodyPr>
-          <a:lstStyle/>
-          <a:p>
-            <a:pPr marL="0" indent="0">
-              <a:buNone/>
-              <a:defRPr>
-                <a:solidFill>
-                  <a:schemeClr val="dk1"/>
-                </a:solidFill>
-              </a:defRPr>
-            </a:pPr>
-            <a:r>
-              <a:rPr b="0" i="0">
-                <a:latin typeface="Consolas"/>
-                <a:solidFill>
-                  <a:schemeClr val="dk1"/>
-                </a:solidFill>
-              </a:rPr>
-              <a:t>markdown-pptx</a:t>
-            </a:r>
-            <a:r>
-              <a:rPr b="0" i="0">
-                <a:latin typeface="+mn-lt"/>
-                <a:ea typeface="+mn-ea"/>
-                <a:cs typeface="+mn-cs"/>
-                <a:solidFill>
-                  <a:schemeClr val="dk1"/>
-                </a:solidFill>
-              </a:rPr>
-              <a:t> can include links in normal body text, such as the </a:t>
-            </a:r>
-            <a:r>
-              <a:rPr b="0" i="0">
-                <a:hlinkClick r:id="rId2"/>
-                <a:latin typeface="+mn-lt"/>
-                <a:ea typeface="+mn-ea"/>
-                <a:cs typeface="+mn-cs"/>
-                <a:solidFill>
-                  <a:schemeClr val="dk1"/>
-                </a:solidFill>
-              </a:rPr>
-              <a:t>project repository</a:t>
-            </a:r>
-            <a:r>
-              <a:rPr b="0" i="0">
-                <a:latin typeface="+mn-lt"/>
-                <a:ea typeface="+mn-ea"/>
-                <a:cs typeface="+mn-cs"/>
-                <a:solidFill>
-                  <a:schemeClr val="dk1"/>
-                </a:solidFill>
-              </a:rPr>
-              <a:t> and the </a:t>
-            </a:r>
-            <a:r>
-              <a:rPr b="0" i="0">
-                <a:hlinkClick r:id="rId3"/>
-                <a:latin typeface="+mn-lt"/>
-                <a:ea typeface="+mn-ea"/>
-                <a:cs typeface="+mn-cs"/>
-                <a:solidFill>
-                  <a:schemeClr val="dk1"/>
-                </a:solidFill>
-              </a:rPr>
-              <a:t>python-pptx documentation</a:t>
-            </a:r>
-            <a:r>
-              <a:rPr b="0" i="0">
-                <a:latin typeface="+mn-lt"/>
-                <a:ea typeface="+mn-ea"/>
-                <a:cs typeface="+mn-cs"/>
-                <a:solidFill>
-                  <a:schemeClr val="dk1"/>
-                </a:solidFill>
-              </a:rPr>
-              <a:t>.</a:t>
-            </a:r>
-            <a:endParaRPr>
-              <a:solidFill>
-                <a:schemeClr val="dk1"/>
               </a:solidFill>
             </a:endParaRPr>
           </a:p>
@@ -5649,7 +5708,7 @@
                   <a:schemeClr val="accent6"/>
                 </a:solidFill>
               </a:rPr>
-              <a:t>Inline text styling</a:t>
+              <a:t>Body text with hyperlinks</a:t>
             </a:r>
             <a:endParaRPr>
               <a:solidFill>
@@ -5686,6 +5745,15 @@
             </a:pPr>
             <a:r>
               <a:rPr b="0" i="0">
+                <a:latin typeface="Consolas"/>
+                <a:solidFill>
+                  <a:schemeClr val="dk1"/>
+                </a:solidFill>
+              </a:rPr>
+              <a:t>markdown-pptx</a:t>
+            </a:r>
+            <a:r>
+              <a:rPr b="0" i="0">
                 <a:latin typeface="+mn-lt"/>
                 <a:ea typeface="+mn-ea"/>
                 <a:cs typeface="+mn-cs"/>
@@ -5693,71 +5761,7 @@
                   <a:schemeClr val="dk1"/>
                 </a:solidFill>
               </a:rPr>
-              <a:t>Normal text can mix </a:t>
-            </a:r>
-            <a:r>
-              <a:rPr b="1" i="0">
-                <a:latin typeface="+mn-lt"/>
-                <a:ea typeface="+mn-ea"/>
-                <a:cs typeface="+mn-cs"/>
-                <a:solidFill>
-                  <a:schemeClr val="dk1"/>
-                </a:solidFill>
-              </a:rPr>
-              <a:t>strong emphasis</a:t>
-            </a:r>
-            <a:r>
-              <a:rPr b="0" i="0">
-                <a:latin typeface="+mn-lt"/>
-                <a:ea typeface="+mn-ea"/>
-                <a:cs typeface="+mn-cs"/>
-                <a:solidFill>
-                  <a:schemeClr val="dk1"/>
-                </a:solidFill>
-              </a:rPr>
-              <a:t>, </a:t>
-            </a:r>
-            <a:r>
-              <a:rPr b="0" i="1">
-                <a:latin typeface="+mn-lt"/>
-                <a:ea typeface="+mn-ea"/>
-                <a:cs typeface="+mn-cs"/>
-                <a:solidFill>
-                  <a:schemeClr val="dk1"/>
-                </a:solidFill>
-              </a:rPr>
-              <a:t>italic emphasis</a:t>
-            </a:r>
-            <a:r>
-              <a:rPr b="0" i="0">
-                <a:latin typeface="+mn-lt"/>
-                <a:ea typeface="+mn-ea"/>
-                <a:cs typeface="+mn-cs"/>
-                <a:solidFill>
-                  <a:schemeClr val="dk1"/>
-                </a:solidFill>
-              </a:rPr>
-              <a:t>, </a:t>
-            </a:r>
-            <a:r>
-              <a:rPr b="0" i="0">
-                <a:latin typeface="Consolas"/>
-                <a:solidFill>
-                  <a:schemeClr val="dk1"/>
-                </a:solidFill>
-              </a:rPr>
-              <a:t>inline code</a:t>
-            </a:r>
-            <a:r>
-              <a:rPr b="0" i="0">
-                <a:latin typeface="+mn-lt"/>
-                <a:ea typeface="+mn-ea"/>
-                <a:cs typeface="+mn-cs"/>
-                <a:solidFill>
-                  <a:schemeClr val="dk1"/>
-                </a:solidFill>
-              </a:rPr>
-              <a:t>, and </a:t>
+              <a:t> can include links in normal body text, such as the </a:t>
             </a:r>
             <a:r>
               <a:rPr b="0" i="0">
@@ -5769,7 +5773,7 @@
                   <a:schemeClr val="dk1"/>
                 </a:solidFill>
               </a:rPr>
-              <a:t>hyperlinks</a:t>
+              <a:t>project repository</a:t>
             </a:r>
             <a:r>
               <a:rPr b="0" i="0">
@@ -5780,7 +5784,30 @@
                   <a:schemeClr val="dk1"/>
                 </a:solidFill>
               </a:rPr>
-              <a:t> in the same editable placeholder.</a:t>
+              <a:t> and the </a:t>
+            </a:r>
+            <a:r>
+              <a:rPr b="0" i="0">
+                <a:hlinkClick r:id="rId3"/>
+                <a:latin typeface="+mn-lt"/>
+                <a:ea typeface="+mn-ea"/>
+                <a:cs typeface="+mn-cs"/>
+                <a:solidFill>
+                  <a:schemeClr val="dk1"/>
+                </a:solidFill>
+              </a:rPr>
+              <a:t>python-pptx documentation</a:t>
+            </a:r>
+            <a:r>
+              <a:rPr b="0" i="0">
+                <a:latin typeface="+mn-lt"/>
+                <a:ea typeface="+mn-ea"/>
+                <a:cs typeface="+mn-cs"/>
+                <a:solidFill>
+                  <a:schemeClr val="dk1"/>
+                </a:solidFill>
+              </a:rPr>
+              <a:t>.</a:t>
             </a:r>
             <a:endParaRPr>
               <a:solidFill>
@@ -5838,7 +5865,7 @@
                   <a:schemeClr val="accent6"/>
                 </a:solidFill>
               </a:rPr>
-              <a:t>H2 through H6 headings</a:t>
+              <a:t>Inline text styling</a:t>
             </a:r>
             <a:endParaRPr>
               <a:solidFill>
@@ -5874,119 +5901,102 @@
               </a:defRPr>
             </a:pPr>
             <a:r>
-              <a:rPr sz="3700" b="1">
-                <a:latin typeface="+mj-lt"/>
-                <a:ea typeface="+mj-ea"/>
-                <a:cs typeface="+mj-cs"/>
-                <a:solidFill>
-                  <a:schemeClr val="dk1"/>
-                </a:solidFill>
-              </a:rPr>
-              <a:t>H2 heading</a:t>
-            </a:r>
-            <a:endParaRPr>
-              <a:solidFill>
-                <a:schemeClr val="dk1"/>
-              </a:solidFill>
-            </a:endParaRPr>
-          </a:p>
-          <a:p>
-            <a:pPr marL="0" indent="0">
-              <a:buNone/>
-              <a:defRPr>
-                <a:solidFill>
-                  <a:schemeClr val="dk1"/>
-                </a:solidFill>
-              </a:defRPr>
-            </a:pPr>
-            <a:r>
-              <a:rPr sz="3400" b="1">
-                <a:latin typeface="+mj-lt"/>
-                <a:ea typeface="+mj-ea"/>
-                <a:cs typeface="+mj-cs"/>
-                <a:solidFill>
-                  <a:schemeClr val="dk1"/>
-                </a:solidFill>
-              </a:rPr>
-              <a:t>H3 heading</a:t>
-            </a:r>
-            <a:endParaRPr>
-              <a:solidFill>
-                <a:schemeClr val="dk1"/>
-              </a:solidFill>
-            </a:endParaRPr>
-          </a:p>
-          <a:p>
-            <a:pPr marL="0" indent="0">
-              <a:buNone/>
-              <a:defRPr>
-                <a:solidFill>
-                  <a:schemeClr val="dk1"/>
-                </a:solidFill>
-              </a:defRPr>
-            </a:pPr>
-            <a:r>
-              <a:rPr sz="3100" b="1">
-                <a:latin typeface="+mj-lt"/>
-                <a:ea typeface="+mj-ea"/>
-                <a:cs typeface="+mj-cs"/>
-                <a:solidFill>
-                  <a:schemeClr val="dk1"/>
-                </a:solidFill>
-              </a:rPr>
-              <a:t>H4 heading</a:t>
-            </a:r>
-            <a:endParaRPr>
-              <a:solidFill>
-                <a:schemeClr val="dk1"/>
-              </a:solidFill>
-            </a:endParaRPr>
-          </a:p>
-          <a:p>
-            <a:pPr marL="0" indent="0">
-              <a:buNone/>
-              <a:defRPr>
-                <a:solidFill>
-                  <a:schemeClr val="dk1"/>
-                </a:solidFill>
-              </a:defRPr>
-            </a:pPr>
-            <a:r>
-              <a:rPr sz="2900" b="1">
-                <a:latin typeface="+mj-lt"/>
-                <a:ea typeface="+mj-ea"/>
-                <a:cs typeface="+mj-cs"/>
-                <a:solidFill>
-                  <a:schemeClr val="dk1"/>
-                </a:solidFill>
-              </a:rPr>
-              <a:t>H5 heading</a:t>
-            </a:r>
-            <a:endParaRPr>
-              <a:solidFill>
-                <a:schemeClr val="dk1"/>
-              </a:solidFill>
-            </a:endParaRPr>
-          </a:p>
-          <a:p>
-            <a:pPr marL="0" indent="0">
-              <a:buNone/>
-              <a:defRPr>
-                <a:solidFill>
-                  <a:schemeClr val="dk1"/>
-                </a:solidFill>
-              </a:defRPr>
-            </a:pPr>
-            <a:r>
-              <a:rPr sz="2800" b="1">
-                <a:latin typeface="+mj-lt"/>
-                <a:ea typeface="+mj-ea"/>
-                <a:cs typeface="+mj-cs"/>
-                <a:solidFill>
-                  <a:schemeClr val="dk1"/>
-                </a:solidFill>
-              </a:rPr>
-              <a:t>H6 heading</a:t>
+              <a:rPr b="0" i="0">
+                <a:latin typeface="+mn-lt"/>
+                <a:ea typeface="+mn-ea"/>
+                <a:cs typeface="+mn-cs"/>
+                <a:solidFill>
+                  <a:schemeClr val="dk1"/>
+                </a:solidFill>
+              </a:rPr>
+              <a:t>Normal text can mix </a:t>
+            </a:r>
+            <a:r>
+              <a:rPr b="1" i="0">
+                <a:latin typeface="+mn-lt"/>
+                <a:ea typeface="+mn-ea"/>
+                <a:cs typeface="+mn-cs"/>
+                <a:solidFill>
+                  <a:schemeClr val="dk1"/>
+                </a:solidFill>
+              </a:rPr>
+              <a:t>strong emphasis</a:t>
+            </a:r>
+            <a:r>
+              <a:rPr b="0" i="0">
+                <a:latin typeface="+mn-lt"/>
+                <a:ea typeface="+mn-ea"/>
+                <a:cs typeface="+mn-cs"/>
+                <a:solidFill>
+                  <a:schemeClr val="dk1"/>
+                </a:solidFill>
+              </a:rPr>
+              <a:t>, </a:t>
+            </a:r>
+            <a:r>
+              <a:rPr b="0" i="1">
+                <a:latin typeface="+mn-lt"/>
+                <a:ea typeface="+mn-ea"/>
+                <a:cs typeface="+mn-cs"/>
+                <a:solidFill>
+                  <a:schemeClr val="dk1"/>
+                </a:solidFill>
+              </a:rPr>
+              <a:t>italic emphasis</a:t>
+            </a:r>
+            <a:r>
+              <a:rPr b="0" i="0">
+                <a:latin typeface="+mn-lt"/>
+                <a:ea typeface="+mn-ea"/>
+                <a:cs typeface="+mn-cs"/>
+                <a:solidFill>
+                  <a:schemeClr val="dk1"/>
+                </a:solidFill>
+              </a:rPr>
+              <a:t>, </a:t>
+            </a:r>
+            <a:r>
+              <a:rPr b="0" i="0">
+                <a:latin typeface="Consolas"/>
+                <a:solidFill>
+                  <a:schemeClr val="dk1"/>
+                </a:solidFill>
+              </a:rPr>
+              <a:t>inline code</a:t>
+            </a:r>
+            <a:r>
+              <a:rPr b="0" i="0">
+                <a:latin typeface="+mn-lt"/>
+                <a:ea typeface="+mn-ea"/>
+                <a:cs typeface="+mn-cs"/>
+                <a:solidFill>
+                  <a:schemeClr val="dk1"/>
+                </a:solidFill>
+              </a:rPr>
+              <a:t>, and </a:t>
+            </a:r>
+            <a:r>
+              <a:rPr b="0" i="0">
+                <a:hlinkClick r:id="rId2"/>
+                <a:latin typeface="+mn-lt"/>
+                <a:ea typeface="+mn-ea"/>
+                <a:cs typeface="+mn-cs"/>
+                <a:solidFill>
+                  <a:schemeClr val="dk1"/>
+                </a:solidFill>
+              </a:rPr>
+              <a:t>hyperlinks</a:t>
+            </a:r>
+            <a:r>
+              <a:rPr b="0" i="0">
+                <a:latin typeface="+mn-lt"/>
+                <a:ea typeface="+mn-ea"/>
+                <a:cs typeface="+mn-cs"/>
+                <a:solidFill>
+                  <a:schemeClr val="dk1"/>
+                </a:solidFill>
+              </a:rPr>
+              <a:t> in the same editable placeholder.</a:t>
             </a:r>
             <a:endParaRPr>
               <a:solidFill>
@@ -6044,7 +6054,7 @@
                   <a:schemeClr val="accent6"/>
                 </a:solidFill>
               </a:rPr>
-              <a:t>Bulleted list</a:t>
+              <a:t>H2 through H6 headings</a:t>
             </a:r>
             <a:endParaRPr>
               <a:solidFill>
@@ -6071,7 +6081,8 @@
           </a:bodyPr>
           <a:lstStyle/>
           <a:p>
-            <a:pPr>
+            <a:pPr marL="0" indent="0">
+              <a:buNone/>
               <a:defRPr>
                 <a:solidFill>
                   <a:schemeClr val="dk1"/>
@@ -6079,15 +6090,15 @@
               </a:defRPr>
             </a:pPr>
             <a:r>
-              <a:rPr b="0" i="0">
-                <a:latin typeface="+mn-lt"/>
-                <a:ea typeface="+mn-ea"/>
-                <a:cs typeface="+mn-cs"/>
-                <a:solidFill>
-                  <a:schemeClr val="dk1"/>
-                </a:solidFill>
-              </a:rPr>
-              <a:t>Write a readable Markdown deck</a:t>
+              <a:rPr sz="3700" b="1">
+                <a:latin typeface="+mj-lt"/>
+                <a:ea typeface="+mj-ea"/>
+                <a:cs typeface="+mj-cs"/>
+                <a:solidFill>
+                  <a:schemeClr val="dk1"/>
+                </a:solidFill>
+              </a:rPr>
+              <a:t>H2 heading</a:t>
             </a:r>
             <a:endParaRPr>
               <a:solidFill>
@@ -6096,7 +6107,8 @@
             </a:endParaRPr>
           </a:p>
           <a:p>
-            <a:pPr>
+            <a:pPr marL="0" indent="0">
+              <a:buNone/>
               <a:defRPr>
                 <a:solidFill>
                   <a:schemeClr val="dk1"/>
@@ -6104,15 +6116,15 @@
               </a:defRPr>
             </a:pPr>
             <a:r>
-              <a:rPr b="0" i="0">
-                <a:latin typeface="+mn-lt"/>
-                <a:ea typeface="+mn-ea"/>
-                <a:cs typeface="+mn-cs"/>
-                <a:solidFill>
-                  <a:schemeClr val="dk1"/>
-                </a:solidFill>
-              </a:rPr>
-              <a:t>Choose a template if needed</a:t>
+              <a:rPr sz="3400" b="1">
+                <a:latin typeface="+mj-lt"/>
+                <a:ea typeface="+mj-ea"/>
+                <a:cs typeface="+mj-cs"/>
+                <a:solidFill>
+                  <a:schemeClr val="dk1"/>
+                </a:solidFill>
+              </a:rPr>
+              <a:t>H3 heading</a:t>
             </a:r>
             <a:endParaRPr>
               <a:solidFill>
@@ -6121,7 +6133,8 @@
             </a:endParaRPr>
           </a:p>
           <a:p>
-            <a:pPr>
+            <a:pPr marL="0" indent="0">
+              <a:buNone/>
               <a:defRPr>
                 <a:solidFill>
                   <a:schemeClr val="dk1"/>
@@ -6129,15 +6142,67 @@
               </a:defRPr>
             </a:pPr>
             <a:r>
-              <a:rPr b="0" i="0">
-                <a:latin typeface="+mn-lt"/>
-                <a:ea typeface="+mn-ea"/>
-                <a:cs typeface="+mn-cs"/>
-                <a:solidFill>
-                  <a:schemeClr val="dk1"/>
-                </a:solidFill>
-              </a:rPr>
-              <a:t>Render an editable PowerPoint file</a:t>
+              <a:rPr sz="3100" b="1">
+                <a:latin typeface="+mj-lt"/>
+                <a:ea typeface="+mj-ea"/>
+                <a:cs typeface="+mj-cs"/>
+                <a:solidFill>
+                  <a:schemeClr val="dk1"/>
+                </a:solidFill>
+              </a:rPr>
+              <a:t>H4 heading</a:t>
+            </a:r>
+            <a:endParaRPr>
+              <a:solidFill>
+                <a:schemeClr val="dk1"/>
+              </a:solidFill>
+            </a:endParaRPr>
+          </a:p>
+          <a:p>
+            <a:pPr marL="0" indent="0">
+              <a:buNone/>
+              <a:defRPr>
+                <a:solidFill>
+                  <a:schemeClr val="dk1"/>
+                </a:solidFill>
+              </a:defRPr>
+            </a:pPr>
+            <a:r>
+              <a:rPr sz="2900" b="1">
+                <a:latin typeface="+mj-lt"/>
+                <a:ea typeface="+mj-ea"/>
+                <a:cs typeface="+mj-cs"/>
+                <a:solidFill>
+                  <a:schemeClr val="dk1"/>
+                </a:solidFill>
+              </a:rPr>
+              <a:t>H5 heading</a:t>
+            </a:r>
+            <a:endParaRPr>
+              <a:solidFill>
+                <a:schemeClr val="dk1"/>
+              </a:solidFill>
+            </a:endParaRPr>
+          </a:p>
+          <a:p>
+            <a:pPr marL="0" indent="0">
+              <a:buNone/>
+              <a:defRPr>
+                <a:solidFill>
+                  <a:schemeClr val="dk1"/>
+                </a:solidFill>
+              </a:defRPr>
+            </a:pPr>
+            <a:r>
+              <a:rPr sz="2800" b="1">
+                <a:latin typeface="+mj-lt"/>
+                <a:ea typeface="+mj-ea"/>
+                <a:cs typeface="+mj-cs"/>
+                <a:solidFill>
+                  <a:schemeClr val="dk1"/>
+                </a:solidFill>
+              </a:rPr>
+              <a:t>H6 heading</a:t>
             </a:r>
             <a:endParaRPr>
               <a:solidFill>
@@ -6195,7 +6260,7 @@
                   <a:schemeClr val="accent6"/>
                 </a:solidFill>
               </a:rPr>
-              <a:t>Nested lists</a:t>
+              <a:t>Bulleted list</a:t>
             </a:r>
             <a:endParaRPr>
               <a:solidFill>
@@ -6238,7 +6303,7 @@
                   <a:schemeClr val="dk1"/>
                 </a:solidFill>
               </a:rPr>
-              <a:t>Inspect the template</a:t>
+              <a:t>Write a readable Markdown deck</a:t>
             </a:r>
             <a:endParaRPr>
               <a:solidFill>
@@ -6247,7 +6312,7 @@
             </a:endParaRPr>
           </a:p>
           <a:p>
-            <a:pPr lvl="1">
+            <a:pPr>
               <a:defRPr>
                 <a:solidFill>
                   <a:schemeClr val="dk1"/>
@@ -6263,7 +6328,7 @@
                   <a:schemeClr val="dk1"/>
                 </a:solidFill>
               </a:rPr>
-              <a:t>Select a master</a:t>
+              <a:t>Choose a template if needed</a:t>
             </a:r>
             <a:endParaRPr>
               <a:solidFill>
@@ -6272,7 +6337,7 @@
             </a:endParaRPr>
           </a:p>
           <a:p>
-            <a:pPr lvl="2">
+            <a:pPr>
               <a:defRPr>
                 <a:solidFill>
                   <a:schemeClr val="dk1"/>
@@ -6288,82 +6353,7 @@
                   <a:schemeClr val="dk1"/>
                 </a:solidFill>
               </a:rPr>
-              <a:t>Choose a compatible layout</a:t>
-            </a:r>
-            <a:endParaRPr>
-              <a:solidFill>
-                <a:schemeClr val="dk1"/>
-              </a:solidFill>
-            </a:endParaRPr>
-          </a:p>
-          <a:p>
-            <a:pPr>
-              <a:defRPr>
-                <a:solidFill>
-                  <a:schemeClr val="dk1"/>
-                </a:solidFill>
-              </a:defRPr>
-            </a:pPr>
-            <a:r>
-              <a:rPr b="0" i="0">
-                <a:latin typeface="+mn-lt"/>
-                <a:ea typeface="+mn-ea"/>
-                <a:cs typeface="+mn-cs"/>
-                <a:solidFill>
-                  <a:schemeClr val="dk1"/>
-                </a:solidFill>
-              </a:rPr>
-              <a:t>Write the Markdown</a:t>
-            </a:r>
-            <a:endParaRPr>
-              <a:solidFill>
-                <a:schemeClr val="dk1"/>
-              </a:solidFill>
-            </a:endParaRPr>
-          </a:p>
-          <a:p>
-            <a:pPr lvl="1">
-              <a:defRPr>
-                <a:solidFill>
-                  <a:schemeClr val="dk1"/>
-                </a:solidFill>
-              </a:defRPr>
-            </a:pPr>
-            <a:r>
-              <a:rPr b="0" i="0">
-                <a:latin typeface="+mn-lt"/>
-                <a:ea typeface="+mn-ea"/>
-                <a:cs typeface="+mn-cs"/>
-                <a:solidFill>
-                  <a:schemeClr val="dk1"/>
-                </a:solidFill>
-              </a:rPr>
-              <a:t>Keep each slide focused</a:t>
-            </a:r>
-            <a:endParaRPr>
-              <a:solidFill>
-                <a:schemeClr val="dk1"/>
-              </a:solidFill>
-            </a:endParaRPr>
-          </a:p>
-          <a:p>
-            <a:pPr>
-              <a:defRPr>
-                <a:solidFill>
-                  <a:schemeClr val="dk1"/>
-                </a:solidFill>
-              </a:defRPr>
-            </a:pPr>
-            <a:r>
-              <a:rPr b="0" i="0">
-                <a:latin typeface="+mn-lt"/>
-                <a:ea typeface="+mn-ea"/>
-                <a:cs typeface="+mn-cs"/>
-                <a:solidFill>
-                  <a:schemeClr val="dk1"/>
-                </a:solidFill>
-              </a:rPr>
-              <a:t>Render and review the PowerPoint</a:t>
+              <a:t>Render an editable PowerPoint file</a:t>
             </a:r>
             <a:endParaRPr>
               <a:solidFill>
@@ -6578,7 +6568,7 @@
                   <a:schemeClr val="accent6"/>
                 </a:solidFill>
               </a:rPr>
-              <a:t>Numbered list</a:t>
+              <a:t>Nested lists</a:t>
             </a:r>
             <a:endParaRPr>
               <a:solidFill>
@@ -6606,7 +6596,6 @@
           <a:lstStyle/>
           <a:p>
             <a:pPr>
-              <a:buAutoNum type="arabicPeriod" startAt="1"/>
               <a:defRPr>
                 <a:solidFill>
                   <a:schemeClr val="dk1"/>
@@ -6622,7 +6611,7 @@
                   <a:schemeClr val="dk1"/>
                 </a:solidFill>
               </a:rPr>
-              <a:t>Write the markdown source</a:t>
+              <a:t>Inspect the template</a:t>
             </a:r>
             <a:endParaRPr>
               <a:solidFill>
@@ -6631,8 +6620,7 @@
             </a:endParaRPr>
           </a:p>
           <a:p>
-            <a:pPr>
-              <a:buAutoNum type="arabicPeriod" startAt="2"/>
+            <a:pPr lvl="1">
               <a:defRPr>
                 <a:solidFill>
                   <a:schemeClr val="dk1"/>
@@ -6648,7 +6636,7 @@
                   <a:schemeClr val="dk1"/>
                 </a:solidFill>
               </a:rPr>
-              <a:t>Run the CLI</a:t>
+              <a:t>Select a master</a:t>
             </a:r>
             <a:endParaRPr>
               <a:solidFill>
@@ -6657,8 +6645,7 @@
             </a:endParaRPr>
           </a:p>
           <a:p>
-            <a:pPr>
-              <a:buAutoNum type="arabicPeriod" startAt="3"/>
+            <a:pPr lvl="2">
               <a:defRPr>
                 <a:solidFill>
                   <a:schemeClr val="dk1"/>
@@ -6674,16 +6661,82 @@
                   <a:schemeClr val="dk1"/>
                 </a:solidFill>
               </a:rPr>
-              <a:t>Open the generated </a:t>
-            </a:r>
-            <a:r>
-              <a:rPr b="0" i="0">
-                <a:latin typeface="Consolas"/>
-                <a:solidFill>
-                  <a:schemeClr val="dk1"/>
-                </a:solidFill>
-              </a:rPr>
-              <a:t>.pptx</a:t>
+              <a:t>Choose a compatible layout</a:t>
+            </a:r>
+            <a:endParaRPr>
+              <a:solidFill>
+                <a:schemeClr val="dk1"/>
+              </a:solidFill>
+            </a:endParaRPr>
+          </a:p>
+          <a:p>
+            <a:pPr>
+              <a:defRPr>
+                <a:solidFill>
+                  <a:schemeClr val="dk1"/>
+                </a:solidFill>
+              </a:defRPr>
+            </a:pPr>
+            <a:r>
+              <a:rPr b="0" i="0">
+                <a:latin typeface="+mn-lt"/>
+                <a:ea typeface="+mn-ea"/>
+                <a:cs typeface="+mn-cs"/>
+                <a:solidFill>
+                  <a:schemeClr val="dk1"/>
+                </a:solidFill>
+              </a:rPr>
+              <a:t>Write the Markdown</a:t>
+            </a:r>
+            <a:endParaRPr>
+              <a:solidFill>
+                <a:schemeClr val="dk1"/>
+              </a:solidFill>
+            </a:endParaRPr>
+          </a:p>
+          <a:p>
+            <a:pPr lvl="1">
+              <a:defRPr>
+                <a:solidFill>
+                  <a:schemeClr val="dk1"/>
+                </a:solidFill>
+              </a:defRPr>
+            </a:pPr>
+            <a:r>
+              <a:rPr b="0" i="0">
+                <a:latin typeface="+mn-lt"/>
+                <a:ea typeface="+mn-ea"/>
+                <a:cs typeface="+mn-cs"/>
+                <a:solidFill>
+                  <a:schemeClr val="dk1"/>
+                </a:solidFill>
+              </a:rPr>
+              <a:t>Keep each slide focused</a:t>
+            </a:r>
+            <a:endParaRPr>
+              <a:solidFill>
+                <a:schemeClr val="dk1"/>
+              </a:solidFill>
+            </a:endParaRPr>
+          </a:p>
+          <a:p>
+            <a:pPr>
+              <a:defRPr>
+                <a:solidFill>
+                  <a:schemeClr val="dk1"/>
+                </a:solidFill>
+              </a:defRPr>
+            </a:pPr>
+            <a:r>
+              <a:rPr b="0" i="0">
+                <a:latin typeface="+mn-lt"/>
+                <a:ea typeface="+mn-ea"/>
+                <a:cs typeface="+mn-cs"/>
+                <a:solidFill>
+                  <a:schemeClr val="dk1"/>
+                </a:solidFill>
+              </a:rPr>
+              <a:t>Render and review the PowerPoint</a:t>
             </a:r>
             <a:endParaRPr>
               <a:solidFill>
@@ -6702,6 +6755,169 @@
 </file>
 
 <file path=ppt/slides/slide21.xml><?xml version="1.0" encoding="utf-8"?>
+<p:sld xmlns:a="http://schemas.openxmlformats.org/drawingml/2006/main" xmlns:p="http://schemas.openxmlformats.org/presentationml/2006/main" xmlns:r="http://schemas.openxmlformats.org/officeDocument/2006/relationships">
+  <p:cSld>
+    <p:spTree>
+      <p:nvGrpSpPr>
+        <p:cNvPr id="1" name=""/>
+        <p:cNvGrpSpPr/>
+        <p:nvPr/>
+      </p:nvGrpSpPr>
+      <p:grpSpPr/>
+      <p:sp>
+        <p:nvSpPr>
+          <p:cNvPr id="2" name="Title 1"/>
+          <p:cNvSpPr>
+            <a:spLocks noGrp="1"/>
+          </p:cNvSpPr>
+          <p:nvPr>
+            <p:ph type="title"/>
+          </p:nvPr>
+        </p:nvSpPr>
+        <p:spPr/>
+        <p:txBody>
+          <a:bodyPr>
+            <a:normAutofit/>
+          </a:bodyPr>
+          <a:lstStyle/>
+          <a:p>
+            <a:pPr>
+              <a:defRPr>
+                <a:solidFill>
+                  <a:schemeClr val="accent6"/>
+                </a:solidFill>
+              </a:defRPr>
+            </a:pPr>
+            <a:r>
+              <a:rPr>
+                <a:solidFill>
+                  <a:schemeClr val="accent6"/>
+                </a:solidFill>
+              </a:rPr>
+              <a:t>Numbered list</a:t>
+            </a:r>
+            <a:endParaRPr>
+              <a:solidFill>
+                <a:schemeClr val="accent6"/>
+              </a:solidFill>
+            </a:endParaRPr>
+          </a:p>
+        </p:txBody>
+      </p:sp>
+      <p:sp>
+        <p:nvSpPr>
+          <p:cNvPr id="3" name="Content Placeholder 2"/>
+          <p:cNvSpPr>
+            <a:spLocks noGrp="1"/>
+          </p:cNvSpPr>
+          <p:nvPr>
+            <p:ph idx="1"/>
+          </p:nvPr>
+        </p:nvSpPr>
+        <p:spPr/>
+        <p:txBody>
+          <a:bodyPr wrap="square">
+            <a:normAutofit/>
+          </a:bodyPr>
+          <a:lstStyle/>
+          <a:p>
+            <a:pPr>
+              <a:buAutoNum type="arabicPeriod" startAt="1"/>
+              <a:defRPr>
+                <a:solidFill>
+                  <a:schemeClr val="dk1"/>
+                </a:solidFill>
+              </a:defRPr>
+            </a:pPr>
+            <a:r>
+              <a:rPr b="0" i="0">
+                <a:latin typeface="+mn-lt"/>
+                <a:ea typeface="+mn-ea"/>
+                <a:cs typeface="+mn-cs"/>
+                <a:solidFill>
+                  <a:schemeClr val="dk1"/>
+                </a:solidFill>
+              </a:rPr>
+              <a:t>Write the markdown source</a:t>
+            </a:r>
+            <a:endParaRPr>
+              <a:solidFill>
+                <a:schemeClr val="dk1"/>
+              </a:solidFill>
+            </a:endParaRPr>
+          </a:p>
+          <a:p>
+            <a:pPr>
+              <a:buAutoNum type="arabicPeriod" startAt="2"/>
+              <a:defRPr>
+                <a:solidFill>
+                  <a:schemeClr val="dk1"/>
+                </a:solidFill>
+              </a:defRPr>
+            </a:pPr>
+            <a:r>
+              <a:rPr b="0" i="0">
+                <a:latin typeface="+mn-lt"/>
+                <a:ea typeface="+mn-ea"/>
+                <a:cs typeface="+mn-cs"/>
+                <a:solidFill>
+                  <a:schemeClr val="dk1"/>
+                </a:solidFill>
+              </a:rPr>
+              <a:t>Run the CLI</a:t>
+            </a:r>
+            <a:endParaRPr>
+              <a:solidFill>
+                <a:schemeClr val="dk1"/>
+              </a:solidFill>
+            </a:endParaRPr>
+          </a:p>
+          <a:p>
+            <a:pPr>
+              <a:buAutoNum type="arabicPeriod" startAt="3"/>
+              <a:defRPr>
+                <a:solidFill>
+                  <a:schemeClr val="dk1"/>
+                </a:solidFill>
+              </a:defRPr>
+            </a:pPr>
+            <a:r>
+              <a:rPr b="0" i="0">
+                <a:latin typeface="+mn-lt"/>
+                <a:ea typeface="+mn-ea"/>
+                <a:cs typeface="+mn-cs"/>
+                <a:solidFill>
+                  <a:schemeClr val="dk1"/>
+                </a:solidFill>
+              </a:rPr>
+              <a:t>Open the generated </a:t>
+            </a:r>
+            <a:r>
+              <a:rPr b="0" i="0">
+                <a:latin typeface="Consolas"/>
+                <a:solidFill>
+                  <a:schemeClr val="dk1"/>
+                </a:solidFill>
+              </a:rPr>
+              <a:t>.pptx</a:t>
+            </a:r>
+            <a:endParaRPr>
+              <a:solidFill>
+                <a:schemeClr val="dk1"/>
+              </a:solidFill>
+            </a:endParaRPr>
+          </a:p>
+        </p:txBody>
+      </p:sp>
+    </p:spTree>
+  </p:cSld>
+  <p:clrMapOvr>
+    <a:masterClrMapping/>
+  </p:clrMapOvr>
+</p:sld>
+</file>
+
+<file path=ppt/slides/slide22.xml><?xml version="1.0" encoding="utf-8"?>
 <p:sld xmlns:a="http://schemas.openxmlformats.org/drawingml/2006/main" xmlns:p="http://schemas.openxmlformats.org/presentationml/2006/main" xmlns:r="http://schemas.openxmlformats.org/officeDocument/2006/relationships">
   <p:cSld>
     <p:spTree>
@@ -7018,7 +7234,7 @@
 </p:sld>
 </file>
 
-<file path=ppt/slides/slide22.xml><?xml version="1.0" encoding="utf-8"?>
+<file path=ppt/slides/slide23.xml><?xml version="1.0" encoding="utf-8"?>
 <p:sld xmlns:a="http://schemas.openxmlformats.org/drawingml/2006/main" xmlns:p="http://schemas.openxmlformats.org/presentationml/2006/main" xmlns:r="http://schemas.openxmlformats.org/officeDocument/2006/relationships">
   <p:cSld>
     <p:spTree>
@@ -7116,7 +7332,7 @@
 </p:sld>
 </file>
 
-<file path=ppt/slides/slide23.xml><?xml version="1.0" encoding="utf-8"?>
+<file path=ppt/slides/slide24.xml><?xml version="1.0" encoding="utf-8"?>
 <p:sld xmlns:a="http://schemas.openxmlformats.org/drawingml/2006/main" xmlns:p="http://schemas.openxmlformats.org/presentationml/2006/main" xmlns:r="http://schemas.openxmlformats.org/officeDocument/2006/relationships">
   <p:cSld>
     <p:spTree>
@@ -7216,7 +7432,7 @@
 </p:sld>
 </file>
 
-<file path=ppt/slides/slide24.xml><?xml version="1.0" encoding="utf-8"?>
+<file path=ppt/slides/slide25.xml><?xml version="1.0" encoding="utf-8"?>
 <p:sld xmlns:a="http://schemas.openxmlformats.org/drawingml/2006/main" xmlns:p="http://schemas.openxmlformats.org/presentationml/2006/main" xmlns:r="http://schemas.openxmlformats.org/officeDocument/2006/relationships">
   <p:cSld>
     <p:spTree>
@@ -7315,7 +7531,7 @@
 </p:sld>
 </file>
 
-<file path=ppt/slides/slide25.xml><?xml version="1.0" encoding="utf-8"?>
+<file path=ppt/slides/slide26.xml><?xml version="1.0" encoding="utf-8"?>
 <p:sld xmlns:a="http://schemas.openxmlformats.org/drawingml/2006/main" xmlns:p="http://schemas.openxmlformats.org/presentationml/2006/main" xmlns:r="http://schemas.openxmlformats.org/officeDocument/2006/relationships">
   <p:cSld>
     <p:spTree>
@@ -7414,7 +7630,7 @@
 </p:sld>
 </file>
 
-<file path=ppt/slides/slide26.xml><?xml version="1.0" encoding="utf-8"?>
+<file path=ppt/slides/slide27.xml><?xml version="1.0" encoding="utf-8"?>
 <p:sld xmlns:a="http://schemas.openxmlformats.org/drawingml/2006/main" xmlns:p="http://schemas.openxmlformats.org/presentationml/2006/main" xmlns:r="http://schemas.openxmlformats.org/officeDocument/2006/relationships">
   <p:cSld>
     <p:bg>
@@ -7524,7 +7740,7 @@
 </p:sld>
 </file>
 
-<file path=ppt/slides/slide27.xml><?xml version="1.0" encoding="utf-8"?>
+<file path=ppt/slides/slide28.xml><?xml version="1.0" encoding="utf-8"?>
 <p:sld xmlns:a="http://schemas.openxmlformats.org/drawingml/2006/main" xmlns:p="http://schemas.openxmlformats.org/presentationml/2006/main" xmlns:r="http://schemas.openxmlformats.org/officeDocument/2006/relationships" showMasterSp="0">
   <p:cSld>
     <p:bg>
@@ -7632,7 +7848,7 @@
 </p:sld>
 </file>
 
-<file path=ppt/slides/slide28.xml><?xml version="1.0" encoding="utf-8"?>
+<file path=ppt/slides/slide29.xml><?xml version="1.0" encoding="utf-8"?>
 <p:sld xmlns:a="http://schemas.openxmlformats.org/drawingml/2006/main" xmlns:p="http://schemas.openxmlformats.org/presentationml/2006/main" xmlns:r="http://schemas.openxmlformats.org/officeDocument/2006/relationships">
   <p:cSld>
     <p:spTree>
@@ -7674,7 +7890,155 @@
 </p:sld>
 </file>
 
-<file path=ppt/slides/slide29.xml><?xml version="1.0" encoding="utf-8"?>
+<file path=ppt/slides/slide3.xml><?xml version="1.0" encoding="utf-8"?>
+<p:sld xmlns:a="http://schemas.openxmlformats.org/drawingml/2006/main" xmlns:p="http://schemas.openxmlformats.org/presentationml/2006/main" xmlns:r="http://schemas.openxmlformats.org/officeDocument/2006/relationships">
+  <p:cSld>
+    <p:spTree>
+      <p:nvGrpSpPr>
+        <p:cNvPr id="1" name=""/>
+        <p:cNvGrpSpPr/>
+        <p:nvPr/>
+      </p:nvGrpSpPr>
+      <p:grpSpPr/>
+      <p:sp>
+        <p:nvSpPr>
+          <p:cNvPr id="2" name="Title 1"/>
+          <p:cNvSpPr>
+            <a:spLocks noGrp="1"/>
+          </p:cNvSpPr>
+          <p:nvPr>
+            <p:ph type="title"/>
+          </p:nvPr>
+        </p:nvSpPr>
+        <p:spPr/>
+        <p:txBody>
+          <a:bodyPr>
+            <a:normAutofit/>
+          </a:bodyPr>
+          <a:lstStyle/>
+          <a:p>
+            <a:pPr>
+              <a:defRPr>
+                <a:solidFill>
+                  <a:schemeClr val="accent6"/>
+                </a:solidFill>
+              </a:defRPr>
+            </a:pPr>
+            <a:r>
+              <a:rPr>
+                <a:solidFill>
+                  <a:schemeClr val="accent6"/>
+                </a:solidFill>
+              </a:rPr>
+              <a:t>How the format works</a:t>
+            </a:r>
+            <a:endParaRPr>
+              <a:solidFill>
+                <a:schemeClr val="accent6"/>
+              </a:solidFill>
+            </a:endParaRPr>
+          </a:p>
+        </p:txBody>
+      </p:sp>
+      <p:sp>
+        <p:nvSpPr>
+          <p:cNvPr id="3" name="Content Placeholder 2"/>
+          <p:cNvSpPr>
+            <a:spLocks noGrp="1"/>
+          </p:cNvSpPr>
+          <p:nvPr>
+            <p:ph idx="1"/>
+          </p:nvPr>
+        </p:nvSpPr>
+        <p:spPr/>
+        <p:txBody>
+          <a:bodyPr wrap="square">
+            <a:normAutofit/>
+          </a:bodyPr>
+          <a:lstStyle/>
+          <a:p>
+            <a:pPr marL="0" indent="0">
+              <a:buNone/>
+              <a:defRPr>
+                <a:solidFill>
+                  <a:schemeClr val="dk1"/>
+                </a:solidFill>
+              </a:defRPr>
+            </a:pPr>
+            <a:r>
+              <a:rPr b="0" i="0">
+                <a:latin typeface="+mn-lt"/>
+                <a:ea typeface="+mn-ea"/>
+                <a:cs typeface="+mn-cs"/>
+                <a:solidFill>
+                  <a:schemeClr val="dk1"/>
+                </a:solidFill>
+              </a:rPr>
+              <a:t>An optional document front matter block sets deck-wide defaults such as aspect ratio, fonts, colors, and background behavior.</a:t>
+            </a:r>
+            <a:endParaRPr>
+              <a:solidFill>
+                <a:schemeClr val="dk1"/>
+              </a:solidFill>
+            </a:endParaRPr>
+          </a:p>
+          <a:p>
+            <a:pPr marL="0" indent="0">
+              <a:buNone/>
+              <a:defRPr>
+                <a:solidFill>
+                  <a:schemeClr val="dk1"/>
+                </a:solidFill>
+              </a:defRPr>
+            </a:pPr>
+            <a:r>
+              <a:rPr b="0" i="0">
+                <a:latin typeface="+mn-lt"/>
+                <a:ea typeface="+mn-ea"/>
+                <a:cs typeface="+mn-cs"/>
+                <a:solidFill>
+                  <a:schemeClr val="dk1"/>
+                </a:solidFill>
+              </a:rPr>
+              <a:t>Each </a:t>
+            </a:r>
+            <a:r>
+              <a:rPr b="0" i="0">
+                <a:latin typeface="Consolas"/>
+                <a:solidFill>
+                  <a:schemeClr val="dk1"/>
+                </a:solidFill>
+              </a:rPr>
+              <a:t># H1</a:t>
+            </a:r>
+            <a:r>
+              <a:rPr b="0" i="0">
+                <a:latin typeface="+mn-lt"/>
+                <a:ea typeface="+mn-ea"/>
+                <a:cs typeface="+mn-cs"/>
+                <a:solidFill>
+                  <a:schemeClr val="dk1"/>
+                </a:solidFill>
+              </a:rPr>
+              <a:t> starts a new slide, optional slide front matter appears immediately after the H1, and everything until the next H1 becomes that slide's content.</a:t>
+            </a:r>
+            <a:endParaRPr>
+              <a:solidFill>
+                <a:schemeClr val="dk1"/>
+              </a:solidFill>
+            </a:endParaRPr>
+          </a:p>
+        </p:txBody>
+      </p:sp>
+    </p:spTree>
+  </p:cSld>
+  <p:clrMapOvr>
+    <a:masterClrMapping/>
+  </p:clrMapOvr>
+</p:sld>
+</file>
+
+<file path=ppt/slides/slide30.xml><?xml version="1.0" encoding="utf-8"?>
 <p:sld xmlns:a="http://schemas.openxmlformats.org/drawingml/2006/main" xmlns:p="http://schemas.openxmlformats.org/presentationml/2006/main" xmlns:r="http://schemas.openxmlformats.org/officeDocument/2006/relationships">
   <p:cSld>
     <p:bg>
@@ -7795,155 +8159,7 @@
 </p:sld>
 </file>
 
-<file path=ppt/slides/slide3.xml><?xml version="1.0" encoding="utf-8"?>
-<p:sld xmlns:a="http://schemas.openxmlformats.org/drawingml/2006/main" xmlns:p="http://schemas.openxmlformats.org/presentationml/2006/main" xmlns:r="http://schemas.openxmlformats.org/officeDocument/2006/relationships">
-  <p:cSld>
-    <p:spTree>
-      <p:nvGrpSpPr>
-        <p:cNvPr id="1" name=""/>
-        <p:cNvGrpSpPr/>
-        <p:nvPr/>
-      </p:nvGrpSpPr>
-      <p:grpSpPr/>
-      <p:sp>
-        <p:nvSpPr>
-          <p:cNvPr id="2" name="Title 1"/>
-          <p:cNvSpPr>
-            <a:spLocks noGrp="1"/>
-          </p:cNvSpPr>
-          <p:nvPr>
-            <p:ph type="title"/>
-          </p:nvPr>
-        </p:nvSpPr>
-        <p:spPr/>
-        <p:txBody>
-          <a:bodyPr>
-            <a:normAutofit/>
-          </a:bodyPr>
-          <a:lstStyle/>
-          <a:p>
-            <a:pPr>
-              <a:defRPr>
-                <a:solidFill>
-                  <a:schemeClr val="accent6"/>
-                </a:solidFill>
-              </a:defRPr>
-            </a:pPr>
-            <a:r>
-              <a:rPr>
-                <a:solidFill>
-                  <a:schemeClr val="accent6"/>
-                </a:solidFill>
-              </a:rPr>
-              <a:t>How the format works</a:t>
-            </a:r>
-            <a:endParaRPr>
-              <a:solidFill>
-                <a:schemeClr val="accent6"/>
-              </a:solidFill>
-            </a:endParaRPr>
-          </a:p>
-        </p:txBody>
-      </p:sp>
-      <p:sp>
-        <p:nvSpPr>
-          <p:cNvPr id="3" name="Content Placeholder 2"/>
-          <p:cNvSpPr>
-            <a:spLocks noGrp="1"/>
-          </p:cNvSpPr>
-          <p:nvPr>
-            <p:ph idx="1"/>
-          </p:nvPr>
-        </p:nvSpPr>
-        <p:spPr/>
-        <p:txBody>
-          <a:bodyPr wrap="square">
-            <a:normAutofit/>
-          </a:bodyPr>
-          <a:lstStyle/>
-          <a:p>
-            <a:pPr marL="0" indent="0">
-              <a:buNone/>
-              <a:defRPr>
-                <a:solidFill>
-                  <a:schemeClr val="dk1"/>
-                </a:solidFill>
-              </a:defRPr>
-            </a:pPr>
-            <a:r>
-              <a:rPr b="0" i="0">
-                <a:latin typeface="+mn-lt"/>
-                <a:ea typeface="+mn-ea"/>
-                <a:cs typeface="+mn-cs"/>
-                <a:solidFill>
-                  <a:schemeClr val="dk1"/>
-                </a:solidFill>
-              </a:rPr>
-              <a:t>An optional document front matter block sets deck-wide defaults such as aspect ratio, fonts, colors, and background behavior.</a:t>
-            </a:r>
-            <a:endParaRPr>
-              <a:solidFill>
-                <a:schemeClr val="dk1"/>
-              </a:solidFill>
-            </a:endParaRPr>
-          </a:p>
-          <a:p>
-            <a:pPr marL="0" indent="0">
-              <a:buNone/>
-              <a:defRPr>
-                <a:solidFill>
-                  <a:schemeClr val="dk1"/>
-                </a:solidFill>
-              </a:defRPr>
-            </a:pPr>
-            <a:r>
-              <a:rPr b="0" i="0">
-                <a:latin typeface="+mn-lt"/>
-                <a:ea typeface="+mn-ea"/>
-                <a:cs typeface="+mn-cs"/>
-                <a:solidFill>
-                  <a:schemeClr val="dk1"/>
-                </a:solidFill>
-              </a:rPr>
-              <a:t>Each </a:t>
-            </a:r>
-            <a:r>
-              <a:rPr b="0" i="0">
-                <a:latin typeface="Consolas"/>
-                <a:solidFill>
-                  <a:schemeClr val="dk1"/>
-                </a:solidFill>
-              </a:rPr>
-              <a:t># H1</a:t>
-            </a:r>
-            <a:r>
-              <a:rPr b="0" i="0">
-                <a:latin typeface="+mn-lt"/>
-                <a:ea typeface="+mn-ea"/>
-                <a:cs typeface="+mn-cs"/>
-                <a:solidFill>
-                  <a:schemeClr val="dk1"/>
-                </a:solidFill>
-              </a:rPr>
-              <a:t> starts a new slide, optional slide front matter appears immediately after the H1, and everything until the next H1 becomes that slide's content.</a:t>
-            </a:r>
-            <a:endParaRPr>
-              <a:solidFill>
-                <a:schemeClr val="dk1"/>
-              </a:solidFill>
-            </a:endParaRPr>
-          </a:p>
-        </p:txBody>
-      </p:sp>
-    </p:spTree>
-  </p:cSld>
-  <p:clrMapOvr>
-    <a:masterClrMapping/>
-  </p:clrMapOvr>
-</p:sld>
-</file>
-
-<file path=ppt/slides/slide30.xml><?xml version="1.0" encoding="utf-8"?>
+<file path=ppt/slides/slide31.xml><?xml version="1.0" encoding="utf-8"?>
 <p:sld xmlns:a="http://schemas.openxmlformats.org/drawingml/2006/main" xmlns:p="http://schemas.openxmlformats.org/presentationml/2006/main" xmlns:r="http://schemas.openxmlformats.org/officeDocument/2006/relationships">
   <p:cSld>
     <p:bg>
@@ -8066,7 +8282,7 @@
 </p:sld>
 </file>
 
-<file path=ppt/slides/slide31.xml><?xml version="1.0" encoding="utf-8"?>
+<file path=ppt/slides/slide32.xml><?xml version="1.0" encoding="utf-8"?>
 <p:sld xmlns:a="http://schemas.openxmlformats.org/drawingml/2006/main" xmlns:p="http://schemas.openxmlformats.org/presentationml/2006/main" xmlns:r="http://schemas.openxmlformats.org/officeDocument/2006/relationships">
   <p:cSld>
     <p:bg>
@@ -8184,7 +8400,7 @@
 </p:sld>
 </file>
 
-<file path=ppt/slides/slide32.xml><?xml version="1.0" encoding="utf-8"?>
+<file path=ppt/slides/slide33.xml><?xml version="1.0" encoding="utf-8"?>
 <p:sld xmlns:a="http://schemas.openxmlformats.org/drawingml/2006/main" xmlns:p="http://schemas.openxmlformats.org/presentationml/2006/main" xmlns:r="http://schemas.openxmlformats.org/officeDocument/2006/relationships">
   <p:cSld>
     <p:spTree>
@@ -8202,7 +8418,7 @@
 </p:sld>
 </file>
 
-<file path=ppt/slides/slide33.xml><?xml version="1.0" encoding="utf-8"?>
+<file path=ppt/slides/slide34.xml><?xml version="1.0" encoding="utf-8"?>
 <p:sld xmlns:a="http://schemas.openxmlformats.org/drawingml/2006/main" xmlns:p="http://schemas.openxmlformats.org/presentationml/2006/main" xmlns:r="http://schemas.openxmlformats.org/officeDocument/2006/relationships">
   <p:cSld>
     <p:spTree>
